--- a/exam-cram-scheduler/docs/presentation/3주차_진행공유.pptx
+++ b/exam-cram-scheduler/docs/presentation/3주차_진행공유.pptx
@@ -16,9 +16,10 @@
     <p:sldId id="264" r:id="rId10"/>
     <p:sldId id="265" r:id="rId11"/>
     <p:sldId id="266" r:id="rId12"/>
+    <p:sldId id="267" r:id="rId13"/>
   </p:sldIdLst>
   <p:notesMasterIdLst>
-    <p:notesMasterId r:id="rId13"/>
+    <p:notesMasterId r:id="rId14"/>
   </p:notesMasterIdLst>
   <p:sldSz cx="9144000" cy="5143500"/>
   <p:notesSz cx="5143500" cy="9144000"/>
@@ -712,6 +713,94 @@
             <a:fld id="{F7021451-1387-4CA6-816F-3879F97B5CBC}" type="slidenum">
               <a:rPr lang="en-US"/>
               <a:t>11</a:t>
+            </a:fld>
+            <a:endParaRPr lang="en-US"/>
+          </a:p>
+        </p:txBody>
+      </p:sp>
+    </p:spTree>
+    <p:extLst>
+      <p:ext uri="{BB962C8B-B14F-4D97-AF65-F5344CB8AC3E}">
+        <p14:creationId xmlns:p14="http://schemas.microsoft.com/office/powerpoint/2010/main" val="1024086991"/>
+      </p:ext>
+    </p:extLst>
+  </p:cSld>
+  <p:clrMapOvr>
+    <a:masterClrMapping/>
+  </p:clrMapOvr>
+</p:notes>
+</file>
+
+<file path=ppt/notesSlides/notesSlide12.xml><?xml version="1.0" encoding="utf-8"?>
+<p:notes xmlns:a="http://schemas.openxmlformats.org/drawingml/2006/main" xmlns:r="http://schemas.openxmlformats.org/officeDocument/2006/relationships" xmlns:p="http://schemas.openxmlformats.org/presentationml/2006/main">
+  <p:cSld>
+    <p:spTree>
+      <p:nvGrpSpPr>
+        <p:cNvPr id="1" name=""/>
+        <p:cNvGrpSpPr/>
+        <p:nvPr/>
+      </p:nvGrpSpPr>
+      <p:grpSpPr>
+        <a:xfrm>
+          <a:off x="0" y="0"/>
+          <a:ext cx="0" cy="0"/>
+          <a:chOff x="0" y="0"/>
+          <a:chExt cx="0" cy="0"/>
+        </a:xfrm>
+      </p:grpSpPr>
+      <p:sp>
+        <p:nvSpPr>
+          <p:cNvPr id="2" name="Slide Image Placeholder 1"/>
+          <p:cNvSpPr>
+            <a:spLocks noGrp="1" noRot="1" noChangeAspect="1"/>
+          </p:cNvSpPr>
+          <p:nvPr>
+            <p:ph type="sldImg"/>
+          </p:nvPr>
+        </p:nvSpPr>
+        <p:spPr/>
+      </p:sp>
+      <p:sp>
+        <p:nvSpPr>
+          <p:cNvPr id="3" name="Notes Placeholder 2"/>
+          <p:cNvSpPr>
+            <a:spLocks noGrp="1"/>
+          </p:cNvSpPr>
+          <p:nvPr>
+            <p:ph type="body" idx="1"/>
+          </p:nvPr>
+        </p:nvSpPr>
+        <p:spPr/>
+        <p:txBody>
+          <a:bodyPr/>
+          <a:lstStyle/>
+          <a:p>
+            <a:r>
+              <a:rPr lang="en-US" dirty="0"/>
+              <a:t/>
+            </a:r>
+            <a:endParaRPr lang="en-US" dirty="0"/>
+          </a:p>
+        </p:txBody>
+      </p:sp>
+      <p:sp>
+        <p:nvSpPr>
+          <p:cNvPr id="4" name="Slide Number Placeholder 3"/>
+          <p:cNvSpPr>
+            <a:spLocks noGrp="1"/>
+          </p:cNvSpPr>
+          <p:nvPr>
+            <p:ph type="sldNum" sz="quarter" idx="10"/>
+          </p:nvPr>
+        </p:nvSpPr>
+        <p:spPr/>
+        <p:txBody>
+          <a:bodyPr/>
+          <a:lstStyle/>
+          <a:p>
+            <a:fld id="{F7021451-1387-4CA6-816F-3879F97B5CBC}" type="slidenum">
+              <a:rPr lang="en-US"/>
+              <a:t>12</a:t>
             </a:fld>
             <a:endParaRPr lang="en-US"/>
           </a:p>
@@ -2616,6 +2705,2165 @@
                 <a:ea typeface="Noto Sans KR" pitchFamily="34" charset="-122"/>
                 <a:cs typeface="Noto Sans KR" pitchFamily="34" charset="-120"/>
               </a:rPr>
+              <a:t>회고 · 일하는 방식</a:t>
+            </a:r>
+            <a:endParaRPr lang="en-US" sz="1200" dirty="0"/>
+          </a:p>
+        </p:txBody>
+      </p:sp>
+      <p:sp>
+        <p:nvSpPr>
+          <p:cNvPr id="3" name="Text 1"/>
+          <p:cNvSpPr/>
+          <p:nvPr/>
+        </p:nvSpPr>
+        <p:spPr>
+          <a:xfrm>
+            <a:off x="457200" y="502920"/>
+            <a:ext cx="8229600" cy="502920"/>
+          </a:xfrm>
+          <a:prstGeom prst="rect">
+            <a:avLst/>
+          </a:prstGeom>
+          <a:noFill/>
+          <a:ln/>
+        </p:spPr>
+        <p:txBody>
+          <a:bodyPr wrap="square" lIns="0" tIns="0" rIns="0" bIns="0" rtlCol="0" anchor="ctr"/>
+          <a:lstStyle/>
+          <a:p>
+            <a:pPr algn="l" indent="0" marL="0">
+              <a:buNone/>
+            </a:pPr>
+            <a:r>
+              <a:rPr lang="en-US" sz="2500" b="1" dirty="0">
+                <a:solidFill>
+                  <a:srgbClr val="201409"/>
+                </a:solidFill>
+                <a:latin typeface="Noto Sans KR" pitchFamily="34" charset="0"/>
+                <a:ea typeface="Noto Sans KR" pitchFamily="34" charset="-122"/>
+                <a:cs typeface="Noto Sans KR" pitchFamily="34" charset="-120"/>
+              </a:rPr>
+              <a:t>AI와 어떻게 일했나 — 3주간의 작업 방식</a:t>
+            </a:r>
+            <a:endParaRPr lang="en-US" sz="2500" dirty="0"/>
+          </a:p>
+        </p:txBody>
+      </p:sp>
+      <p:sp>
+        <p:nvSpPr>
+          <p:cNvPr id="4" name="Shape 2"/>
+          <p:cNvSpPr/>
+          <p:nvPr/>
+        </p:nvSpPr>
+        <p:spPr>
+          <a:xfrm>
+            <a:off x="457200" y="1060704"/>
+            <a:ext cx="457200" cy="41148"/>
+          </a:xfrm>
+          <a:prstGeom prst="rect">
+            <a:avLst/>
+          </a:prstGeom>
+          <a:solidFill>
+            <a:srgbClr val="9A5B28"/>
+          </a:solidFill>
+          <a:ln/>
+        </p:spPr>
+      </p:sp>
+      <p:sp>
+        <p:nvSpPr>
+          <p:cNvPr id="5" name="Text 3"/>
+          <p:cNvSpPr/>
+          <p:nvPr/>
+        </p:nvSpPr>
+        <p:spPr>
+          <a:xfrm>
+            <a:off x="457200" y="1188720"/>
+            <a:ext cx="8229600" cy="256032"/>
+          </a:xfrm>
+          <a:prstGeom prst="rect">
+            <a:avLst/>
+          </a:prstGeom>
+          <a:noFill/>
+          <a:ln/>
+        </p:spPr>
+        <p:txBody>
+          <a:bodyPr wrap="square" lIns="0" tIns="0" rIns="0" bIns="0" rtlCol="0" anchor="ctr"/>
+          <a:lstStyle/>
+          <a:p>
+            <a:pPr algn="l" indent="0" marL="0">
+              <a:buNone/>
+            </a:pPr>
+            <a:r>
+              <a:rPr lang="en-US" sz="1150" b="1" dirty="0">
+                <a:solidFill>
+                  <a:srgbClr val="201409"/>
+                </a:solidFill>
+                <a:latin typeface="Noto Sans KR" pitchFamily="34" charset="0"/>
+                <a:ea typeface="Noto Sans KR" pitchFamily="34" charset="-122"/>
+                <a:cs typeface="Noto Sans KR" pitchFamily="34" charset="-120"/>
+              </a:rPr>
+              <a:t>작업 순서 — 이슈 하나를 처리하는 사이클</a:t>
+            </a:r>
+            <a:endParaRPr lang="en-US" sz="1150" dirty="0"/>
+          </a:p>
+        </p:txBody>
+      </p:sp>
+      <p:sp>
+        <p:nvSpPr>
+          <p:cNvPr id="6" name="Shape 4"/>
+          <p:cNvSpPr/>
+          <p:nvPr/>
+        </p:nvSpPr>
+        <p:spPr>
+          <a:xfrm>
+            <a:off x="457200" y="1481328"/>
+            <a:ext cx="1261872" cy="1051560"/>
+          </a:xfrm>
+          <a:prstGeom prst="roundRect">
+            <a:avLst>
+              <a:gd name="adj" fmla="val 7826"/>
+            </a:avLst>
+          </a:prstGeom>
+          <a:solidFill>
+            <a:srgbClr val="F6F1E9"/>
+          </a:solidFill>
+          <a:ln/>
+        </p:spPr>
+      </p:sp>
+      <p:sp>
+        <p:nvSpPr>
+          <p:cNvPr id="7" name="Shape 5"/>
+          <p:cNvSpPr/>
+          <p:nvPr/>
+        </p:nvSpPr>
+        <p:spPr>
+          <a:xfrm>
+            <a:off x="950976" y="1591056"/>
+            <a:ext cx="274320" cy="274320"/>
+          </a:xfrm>
+          <a:prstGeom prst="ellipse">
+            <a:avLst/>
+          </a:prstGeom>
+          <a:solidFill>
+            <a:srgbClr val="9A5B28"/>
+          </a:solidFill>
+          <a:ln/>
+        </p:spPr>
+      </p:sp>
+      <p:sp>
+        <p:nvSpPr>
+          <p:cNvPr id="8" name="Text 6"/>
+          <p:cNvSpPr/>
+          <p:nvPr/>
+        </p:nvSpPr>
+        <p:spPr>
+          <a:xfrm>
+            <a:off x="950976" y="1591056"/>
+            <a:ext cx="274320" cy="274320"/>
+          </a:xfrm>
+          <a:prstGeom prst="rect">
+            <a:avLst/>
+          </a:prstGeom>
+          <a:noFill/>
+          <a:ln/>
+        </p:spPr>
+        <p:txBody>
+          <a:bodyPr wrap="square" lIns="0" tIns="0" rIns="0" bIns="0" rtlCol="0" anchor="ctr"/>
+          <a:lstStyle/>
+          <a:p>
+            <a:pPr algn="ctr" indent="0" marL="0">
+              <a:buNone/>
+            </a:pPr>
+            <a:r>
+              <a:rPr lang="en-US" sz="1000" b="1" dirty="0">
+                <a:solidFill>
+                  <a:srgbClr val="FFFFFF"/>
+                </a:solidFill>
+                <a:latin typeface="Noto Sans KR" pitchFamily="34" charset="0"/>
+                <a:ea typeface="Noto Sans KR" pitchFamily="34" charset="-122"/>
+                <a:cs typeface="Noto Sans KR" pitchFamily="34" charset="-120"/>
+              </a:rPr>
+              <a:t>1</a:t>
+            </a:r>
+            <a:endParaRPr lang="en-US" sz="1000" dirty="0"/>
+          </a:p>
+        </p:txBody>
+      </p:sp>
+      <p:sp>
+        <p:nvSpPr>
+          <p:cNvPr id="9" name="Text 7"/>
+          <p:cNvSpPr/>
+          <p:nvPr/>
+        </p:nvSpPr>
+        <p:spPr>
+          <a:xfrm>
+            <a:off x="512064" y="1901952"/>
+            <a:ext cx="1152144" cy="219456"/>
+          </a:xfrm>
+          <a:prstGeom prst="rect">
+            <a:avLst/>
+          </a:prstGeom>
+          <a:noFill/>
+          <a:ln/>
+        </p:spPr>
+        <p:txBody>
+          <a:bodyPr wrap="square" lIns="0" tIns="0" rIns="0" bIns="0" rtlCol="0" anchor="ctr"/>
+          <a:lstStyle/>
+          <a:p>
+            <a:pPr algn="ctr" indent="0" marL="0">
+              <a:buNone/>
+            </a:pPr>
+            <a:r>
+              <a:rPr lang="en-US" sz="930" b="1" dirty="0">
+                <a:solidFill>
+                  <a:srgbClr val="201409"/>
+                </a:solidFill>
+                <a:latin typeface="Noto Sans KR" pitchFamily="34" charset="0"/>
+                <a:ea typeface="Noto Sans KR" pitchFamily="34" charset="-122"/>
+                <a:cs typeface="Noto Sans KR" pitchFamily="34" charset="-120"/>
+              </a:rPr>
+              <a:t>이슈 파악</a:t>
+            </a:r>
+            <a:endParaRPr lang="en-US" sz="930" dirty="0"/>
+          </a:p>
+        </p:txBody>
+      </p:sp>
+      <p:sp>
+        <p:nvSpPr>
+          <p:cNvPr id="10" name="Text 8"/>
+          <p:cNvSpPr/>
+          <p:nvPr/>
+        </p:nvSpPr>
+        <p:spPr>
+          <a:xfrm>
+            <a:off x="530352" y="2139696"/>
+            <a:ext cx="1115568" cy="329184"/>
+          </a:xfrm>
+          <a:prstGeom prst="rect">
+            <a:avLst/>
+          </a:prstGeom>
+          <a:noFill/>
+          <a:ln/>
+        </p:spPr>
+        <p:txBody>
+          <a:bodyPr wrap="square" lIns="0" tIns="0" rIns="0" bIns="0" rtlCol="0" anchor="t"/>
+          <a:lstStyle/>
+          <a:p>
+            <a:pPr algn="ctr" indent="0" marL="0">
+              <a:lnSpc>
+                <a:spcPct val="120000"/>
+              </a:lnSpc>
+              <a:buNone/>
+            </a:pPr>
+            <a:r>
+              <a:rPr lang="en-US" sz="730" dirty="0">
+                <a:solidFill>
+                  <a:srgbClr val="786A5C"/>
+                </a:solidFill>
+                <a:latin typeface="Noto Sans KR" pitchFamily="34" charset="0"/>
+                <a:ea typeface="Noto Sans KR" pitchFamily="34" charset="-122"/>
+                <a:cs typeface="Noto Sans KR" pitchFamily="34" charset="-120"/>
+              </a:rPr>
+              <a:t>GitHub 이슈로</a:t>
+            </a:r>
+            <a:endParaRPr lang="en-US" sz="730" dirty="0"/>
+          </a:p>
+          <a:p>
+            <a:pPr algn="ctr" indent="0" marL="0">
+              <a:lnSpc>
+                <a:spcPct val="120000"/>
+              </a:lnSpc>
+              <a:buNone/>
+            </a:pPr>
+            <a:r>
+              <a:rPr lang="en-US" sz="730" dirty="0">
+                <a:solidFill>
+                  <a:srgbClr val="786A5C"/>
+                </a:solidFill>
+                <a:latin typeface="Noto Sans KR" pitchFamily="34" charset="0"/>
+                <a:ea typeface="Noto Sans KR" pitchFamily="34" charset="-122"/>
+                <a:cs typeface="Noto Sans KR" pitchFamily="34" charset="-120"/>
+              </a:rPr>
+              <a:t>할 작업 범위 확인</a:t>
+            </a:r>
+            <a:endParaRPr lang="en-US" sz="730" dirty="0"/>
+          </a:p>
+        </p:txBody>
+      </p:sp>
+      <p:sp>
+        <p:nvSpPr>
+          <p:cNvPr id="11" name="Shape 9"/>
+          <p:cNvSpPr/>
+          <p:nvPr/>
+        </p:nvSpPr>
+        <p:spPr>
+          <a:xfrm>
+            <a:off x="1735531" y="2007108"/>
+            <a:ext cx="98755" cy="0"/>
+          </a:xfrm>
+          <a:prstGeom prst="line">
+            <a:avLst/>
+          </a:prstGeom>
+          <a:noFill/>
+          <a:ln w="19050">
+            <a:solidFill>
+              <a:srgbClr val="9A5B28"/>
+            </a:solidFill>
+            <a:prstDash val="solid"/>
+            <a:tailEnd type="triangle"/>
+          </a:ln>
+        </p:spPr>
+      </p:sp>
+      <p:sp>
+        <p:nvSpPr>
+          <p:cNvPr id="12" name="Shape 10"/>
+          <p:cNvSpPr/>
+          <p:nvPr/>
+        </p:nvSpPr>
+        <p:spPr>
+          <a:xfrm>
+            <a:off x="1850746" y="1481328"/>
+            <a:ext cx="1261872" cy="1051560"/>
+          </a:xfrm>
+          <a:prstGeom prst="roundRect">
+            <a:avLst>
+              <a:gd name="adj" fmla="val 7826"/>
+            </a:avLst>
+          </a:prstGeom>
+          <a:solidFill>
+            <a:srgbClr val="F6F1E9"/>
+          </a:solidFill>
+          <a:ln/>
+        </p:spPr>
+      </p:sp>
+      <p:sp>
+        <p:nvSpPr>
+          <p:cNvPr id="13" name="Shape 11"/>
+          <p:cNvSpPr/>
+          <p:nvPr/>
+        </p:nvSpPr>
+        <p:spPr>
+          <a:xfrm>
+            <a:off x="2344522" y="1591056"/>
+            <a:ext cx="274320" cy="274320"/>
+          </a:xfrm>
+          <a:prstGeom prst="ellipse">
+            <a:avLst/>
+          </a:prstGeom>
+          <a:solidFill>
+            <a:srgbClr val="9A5B28"/>
+          </a:solidFill>
+          <a:ln/>
+        </p:spPr>
+      </p:sp>
+      <p:sp>
+        <p:nvSpPr>
+          <p:cNvPr id="14" name="Text 12"/>
+          <p:cNvSpPr/>
+          <p:nvPr/>
+        </p:nvSpPr>
+        <p:spPr>
+          <a:xfrm>
+            <a:off x="2344522" y="1591056"/>
+            <a:ext cx="274320" cy="274320"/>
+          </a:xfrm>
+          <a:prstGeom prst="rect">
+            <a:avLst/>
+          </a:prstGeom>
+          <a:noFill/>
+          <a:ln/>
+        </p:spPr>
+        <p:txBody>
+          <a:bodyPr wrap="square" lIns="0" tIns="0" rIns="0" bIns="0" rtlCol="0" anchor="ctr"/>
+          <a:lstStyle/>
+          <a:p>
+            <a:pPr algn="ctr" indent="0" marL="0">
+              <a:buNone/>
+            </a:pPr>
+            <a:r>
+              <a:rPr lang="en-US" sz="1000" b="1" dirty="0">
+                <a:solidFill>
+                  <a:srgbClr val="FFFFFF"/>
+                </a:solidFill>
+                <a:latin typeface="Noto Sans KR" pitchFamily="34" charset="0"/>
+                <a:ea typeface="Noto Sans KR" pitchFamily="34" charset="-122"/>
+                <a:cs typeface="Noto Sans KR" pitchFamily="34" charset="-120"/>
+              </a:rPr>
+              <a:t>2</a:t>
+            </a:r>
+            <a:endParaRPr lang="en-US" sz="1000" dirty="0"/>
+          </a:p>
+        </p:txBody>
+      </p:sp>
+      <p:sp>
+        <p:nvSpPr>
+          <p:cNvPr id="15" name="Text 13"/>
+          <p:cNvSpPr/>
+          <p:nvPr/>
+        </p:nvSpPr>
+        <p:spPr>
+          <a:xfrm>
+            <a:off x="1905610" y="1901952"/>
+            <a:ext cx="1152144" cy="219456"/>
+          </a:xfrm>
+          <a:prstGeom prst="rect">
+            <a:avLst/>
+          </a:prstGeom>
+          <a:noFill/>
+          <a:ln/>
+        </p:spPr>
+        <p:txBody>
+          <a:bodyPr wrap="square" lIns="0" tIns="0" rIns="0" bIns="0" rtlCol="0" anchor="ctr"/>
+          <a:lstStyle/>
+          <a:p>
+            <a:pPr algn="ctr" indent="0" marL="0">
+              <a:buNone/>
+            </a:pPr>
+            <a:r>
+              <a:rPr lang="en-US" sz="930" b="1" dirty="0">
+                <a:solidFill>
+                  <a:srgbClr val="201409"/>
+                </a:solidFill>
+                <a:latin typeface="Noto Sans KR" pitchFamily="34" charset="0"/>
+                <a:ea typeface="Noto Sans KR" pitchFamily="34" charset="-122"/>
+                <a:cs typeface="Noto Sans KR" pitchFamily="34" charset="-120"/>
+              </a:rPr>
+              <a:t>설명 듣고 검증</a:t>
+            </a:r>
+            <a:endParaRPr lang="en-US" sz="930" dirty="0"/>
+          </a:p>
+        </p:txBody>
+      </p:sp>
+      <p:sp>
+        <p:nvSpPr>
+          <p:cNvPr id="16" name="Text 14"/>
+          <p:cNvSpPr/>
+          <p:nvPr/>
+        </p:nvSpPr>
+        <p:spPr>
+          <a:xfrm>
+            <a:off x="1923898" y="2139696"/>
+            <a:ext cx="1115568" cy="329184"/>
+          </a:xfrm>
+          <a:prstGeom prst="rect">
+            <a:avLst/>
+          </a:prstGeom>
+          <a:noFill/>
+          <a:ln/>
+        </p:spPr>
+        <p:txBody>
+          <a:bodyPr wrap="square" lIns="0" tIns="0" rIns="0" bIns="0" rtlCol="0" anchor="t"/>
+          <a:lstStyle/>
+          <a:p>
+            <a:pPr algn="ctr" indent="0" marL="0">
+              <a:lnSpc>
+                <a:spcPct val="120000"/>
+              </a:lnSpc>
+              <a:buNone/>
+            </a:pPr>
+            <a:r>
+              <a:rPr lang="en-US" sz="730" dirty="0">
+                <a:solidFill>
+                  <a:srgbClr val="786A5C"/>
+                </a:solidFill>
+                <a:latin typeface="Noto Sans KR" pitchFamily="34" charset="0"/>
+                <a:ea typeface="Noto Sans KR" pitchFamily="34" charset="-122"/>
+                <a:cs typeface="Noto Sans KR" pitchFamily="34" charset="-120"/>
+              </a:rPr>
+              <a:t>AI 설명 듣고 근거·</a:t>
+            </a:r>
+            <a:endParaRPr lang="en-US" sz="730" dirty="0"/>
+          </a:p>
+          <a:p>
+            <a:pPr algn="ctr" indent="0" marL="0">
+              <a:lnSpc>
+                <a:spcPct val="120000"/>
+              </a:lnSpc>
+              <a:buNone/>
+            </a:pPr>
+            <a:r>
+              <a:rPr lang="en-US" sz="730" dirty="0">
+                <a:solidFill>
+                  <a:srgbClr val="786A5C"/>
+                </a:solidFill>
+                <a:latin typeface="Noto Sans KR" pitchFamily="34" charset="0"/>
+                <a:ea typeface="Noto Sans KR" pitchFamily="34" charset="-122"/>
+                <a:cs typeface="Noto Sans KR" pitchFamily="34" charset="-120"/>
+              </a:rPr>
+              <a:t>수식이 맞는지 검증</a:t>
+            </a:r>
+            <a:endParaRPr lang="en-US" sz="730" dirty="0"/>
+          </a:p>
+        </p:txBody>
+      </p:sp>
+      <p:sp>
+        <p:nvSpPr>
+          <p:cNvPr id="17" name="Shape 15"/>
+          <p:cNvSpPr/>
+          <p:nvPr/>
+        </p:nvSpPr>
+        <p:spPr>
+          <a:xfrm>
+            <a:off x="3129077" y="2007108"/>
+            <a:ext cx="98755" cy="0"/>
+          </a:xfrm>
+          <a:prstGeom prst="line">
+            <a:avLst/>
+          </a:prstGeom>
+          <a:noFill/>
+          <a:ln w="19050">
+            <a:solidFill>
+              <a:srgbClr val="9A5B28"/>
+            </a:solidFill>
+            <a:prstDash val="solid"/>
+            <a:tailEnd type="triangle"/>
+          </a:ln>
+        </p:spPr>
+      </p:sp>
+      <p:sp>
+        <p:nvSpPr>
+          <p:cNvPr id="18" name="Shape 16"/>
+          <p:cNvSpPr/>
+          <p:nvPr/>
+        </p:nvSpPr>
+        <p:spPr>
+          <a:xfrm>
+            <a:off x="3244291" y="1481328"/>
+            <a:ext cx="1261872" cy="1051560"/>
+          </a:xfrm>
+          <a:prstGeom prst="roundRect">
+            <a:avLst>
+              <a:gd name="adj" fmla="val 7826"/>
+            </a:avLst>
+          </a:prstGeom>
+          <a:solidFill>
+            <a:srgbClr val="F6F1E9"/>
+          </a:solidFill>
+          <a:ln/>
+        </p:spPr>
+      </p:sp>
+      <p:sp>
+        <p:nvSpPr>
+          <p:cNvPr id="19" name="Shape 17"/>
+          <p:cNvSpPr/>
+          <p:nvPr/>
+        </p:nvSpPr>
+        <p:spPr>
+          <a:xfrm>
+            <a:off x="3738067" y="1591056"/>
+            <a:ext cx="274320" cy="274320"/>
+          </a:xfrm>
+          <a:prstGeom prst="ellipse">
+            <a:avLst/>
+          </a:prstGeom>
+          <a:solidFill>
+            <a:srgbClr val="9A5B28"/>
+          </a:solidFill>
+          <a:ln/>
+        </p:spPr>
+      </p:sp>
+      <p:sp>
+        <p:nvSpPr>
+          <p:cNvPr id="20" name="Text 18"/>
+          <p:cNvSpPr/>
+          <p:nvPr/>
+        </p:nvSpPr>
+        <p:spPr>
+          <a:xfrm>
+            <a:off x="3738067" y="1591056"/>
+            <a:ext cx="274320" cy="274320"/>
+          </a:xfrm>
+          <a:prstGeom prst="rect">
+            <a:avLst/>
+          </a:prstGeom>
+          <a:noFill/>
+          <a:ln/>
+        </p:spPr>
+        <p:txBody>
+          <a:bodyPr wrap="square" lIns="0" tIns="0" rIns="0" bIns="0" rtlCol="0" anchor="ctr"/>
+          <a:lstStyle/>
+          <a:p>
+            <a:pPr algn="ctr" indent="0" marL="0">
+              <a:buNone/>
+            </a:pPr>
+            <a:r>
+              <a:rPr lang="en-US" sz="1000" b="1" dirty="0">
+                <a:solidFill>
+                  <a:srgbClr val="FFFFFF"/>
+                </a:solidFill>
+                <a:latin typeface="Noto Sans KR" pitchFamily="34" charset="0"/>
+                <a:ea typeface="Noto Sans KR" pitchFamily="34" charset="-122"/>
+                <a:cs typeface="Noto Sans KR" pitchFamily="34" charset="-120"/>
+              </a:rPr>
+              <a:t>3</a:t>
+            </a:r>
+            <a:endParaRPr lang="en-US" sz="1000" dirty="0"/>
+          </a:p>
+        </p:txBody>
+      </p:sp>
+      <p:sp>
+        <p:nvSpPr>
+          <p:cNvPr id="21" name="Text 19"/>
+          <p:cNvSpPr/>
+          <p:nvPr/>
+        </p:nvSpPr>
+        <p:spPr>
+          <a:xfrm>
+            <a:off x="3299155" y="1901952"/>
+            <a:ext cx="1152144" cy="219456"/>
+          </a:xfrm>
+          <a:prstGeom prst="rect">
+            <a:avLst/>
+          </a:prstGeom>
+          <a:noFill/>
+          <a:ln/>
+        </p:spPr>
+        <p:txBody>
+          <a:bodyPr wrap="square" lIns="0" tIns="0" rIns="0" bIns="0" rtlCol="0" anchor="ctr"/>
+          <a:lstStyle/>
+          <a:p>
+            <a:pPr algn="ctr" indent="0" marL="0">
+              <a:buNone/>
+            </a:pPr>
+            <a:r>
+              <a:rPr lang="en-US" sz="930" b="1" dirty="0">
+                <a:solidFill>
+                  <a:srgbClr val="201409"/>
+                </a:solidFill>
+                <a:latin typeface="Noto Sans KR" pitchFamily="34" charset="0"/>
+                <a:ea typeface="Noto Sans KR" pitchFamily="34" charset="-122"/>
+                <a:cs typeface="Noto Sans KR" pitchFamily="34" charset="-120"/>
+              </a:rPr>
+              <a:t>계획 이해</a:t>
+            </a:r>
+            <a:endParaRPr lang="en-US" sz="930" dirty="0"/>
+          </a:p>
+        </p:txBody>
+      </p:sp>
+      <p:sp>
+        <p:nvSpPr>
+          <p:cNvPr id="22" name="Text 20"/>
+          <p:cNvSpPr/>
+          <p:nvPr/>
+        </p:nvSpPr>
+        <p:spPr>
+          <a:xfrm>
+            <a:off x="3317443" y="2139696"/>
+            <a:ext cx="1115568" cy="329184"/>
+          </a:xfrm>
+          <a:prstGeom prst="rect">
+            <a:avLst/>
+          </a:prstGeom>
+          <a:noFill/>
+          <a:ln/>
+        </p:spPr>
+        <p:txBody>
+          <a:bodyPr wrap="square" lIns="0" tIns="0" rIns="0" bIns="0" rtlCol="0" anchor="t"/>
+          <a:lstStyle/>
+          <a:p>
+            <a:pPr algn="ctr" indent="0" marL="0">
+              <a:lnSpc>
+                <a:spcPct val="120000"/>
+              </a:lnSpc>
+              <a:buNone/>
+            </a:pPr>
+            <a:r>
+              <a:rPr lang="en-US" sz="730" dirty="0">
+                <a:solidFill>
+                  <a:srgbClr val="786A5C"/>
+                </a:solidFill>
+                <a:latin typeface="Noto Sans KR" pitchFamily="34" charset="0"/>
+                <a:ea typeface="Noto Sans KR" pitchFamily="34" charset="-122"/>
+                <a:cs typeface="Noto Sans KR" pitchFamily="34" charset="-120"/>
+              </a:rPr>
+              <a:t>구현 계획을 이해될</a:t>
+            </a:r>
+            <a:endParaRPr lang="en-US" sz="730" dirty="0"/>
+          </a:p>
+          <a:p>
+            <a:pPr algn="ctr" indent="0" marL="0">
+              <a:lnSpc>
+                <a:spcPct val="120000"/>
+              </a:lnSpc>
+              <a:buNone/>
+            </a:pPr>
+            <a:r>
+              <a:rPr lang="en-US" sz="730" dirty="0">
+                <a:solidFill>
+                  <a:srgbClr val="786A5C"/>
+                </a:solidFill>
+                <a:latin typeface="Noto Sans KR" pitchFamily="34" charset="0"/>
+                <a:ea typeface="Noto Sans KR" pitchFamily="34" charset="-122"/>
+                <a:cs typeface="Noto Sans KR" pitchFamily="34" charset="-120"/>
+              </a:rPr>
+              <a:t>때까지 되묻기</a:t>
+            </a:r>
+            <a:endParaRPr lang="en-US" sz="730" dirty="0"/>
+          </a:p>
+        </p:txBody>
+      </p:sp>
+      <p:sp>
+        <p:nvSpPr>
+          <p:cNvPr id="23" name="Shape 21"/>
+          <p:cNvSpPr/>
+          <p:nvPr/>
+        </p:nvSpPr>
+        <p:spPr>
+          <a:xfrm>
+            <a:off x="4522622" y="2007108"/>
+            <a:ext cx="98755" cy="0"/>
+          </a:xfrm>
+          <a:prstGeom prst="line">
+            <a:avLst/>
+          </a:prstGeom>
+          <a:noFill/>
+          <a:ln w="19050">
+            <a:solidFill>
+              <a:srgbClr val="9A5B28"/>
+            </a:solidFill>
+            <a:prstDash val="solid"/>
+            <a:tailEnd type="triangle"/>
+          </a:ln>
+        </p:spPr>
+      </p:sp>
+      <p:sp>
+        <p:nvSpPr>
+          <p:cNvPr id="24" name="Shape 22"/>
+          <p:cNvSpPr/>
+          <p:nvPr/>
+        </p:nvSpPr>
+        <p:spPr>
+          <a:xfrm>
+            <a:off x="4637837" y="1481328"/>
+            <a:ext cx="1261872" cy="1051560"/>
+          </a:xfrm>
+          <a:prstGeom prst="roundRect">
+            <a:avLst>
+              <a:gd name="adj" fmla="val 7826"/>
+            </a:avLst>
+          </a:prstGeom>
+          <a:solidFill>
+            <a:srgbClr val="F6F1E9"/>
+          </a:solidFill>
+          <a:ln/>
+        </p:spPr>
+      </p:sp>
+      <p:sp>
+        <p:nvSpPr>
+          <p:cNvPr id="25" name="Shape 23"/>
+          <p:cNvSpPr/>
+          <p:nvPr/>
+        </p:nvSpPr>
+        <p:spPr>
+          <a:xfrm>
+            <a:off x="5131613" y="1591056"/>
+            <a:ext cx="274320" cy="274320"/>
+          </a:xfrm>
+          <a:prstGeom prst="ellipse">
+            <a:avLst/>
+          </a:prstGeom>
+          <a:solidFill>
+            <a:srgbClr val="9A5B28"/>
+          </a:solidFill>
+          <a:ln/>
+        </p:spPr>
+      </p:sp>
+      <p:sp>
+        <p:nvSpPr>
+          <p:cNvPr id="26" name="Text 24"/>
+          <p:cNvSpPr/>
+          <p:nvPr/>
+        </p:nvSpPr>
+        <p:spPr>
+          <a:xfrm>
+            <a:off x="5131613" y="1591056"/>
+            <a:ext cx="274320" cy="274320"/>
+          </a:xfrm>
+          <a:prstGeom prst="rect">
+            <a:avLst/>
+          </a:prstGeom>
+          <a:noFill/>
+          <a:ln/>
+        </p:spPr>
+        <p:txBody>
+          <a:bodyPr wrap="square" lIns="0" tIns="0" rIns="0" bIns="0" rtlCol="0" anchor="ctr"/>
+          <a:lstStyle/>
+          <a:p>
+            <a:pPr algn="ctr" indent="0" marL="0">
+              <a:buNone/>
+            </a:pPr>
+            <a:r>
+              <a:rPr lang="en-US" sz="1000" b="1" dirty="0">
+                <a:solidFill>
+                  <a:srgbClr val="FFFFFF"/>
+                </a:solidFill>
+                <a:latin typeface="Noto Sans KR" pitchFamily="34" charset="0"/>
+                <a:ea typeface="Noto Sans KR" pitchFamily="34" charset="-122"/>
+                <a:cs typeface="Noto Sans KR" pitchFamily="34" charset="-120"/>
+              </a:rPr>
+              <a:t>4</a:t>
+            </a:r>
+            <a:endParaRPr lang="en-US" sz="1000" dirty="0"/>
+          </a:p>
+        </p:txBody>
+      </p:sp>
+      <p:sp>
+        <p:nvSpPr>
+          <p:cNvPr id="27" name="Text 25"/>
+          <p:cNvSpPr/>
+          <p:nvPr/>
+        </p:nvSpPr>
+        <p:spPr>
+          <a:xfrm>
+            <a:off x="4692701" y="1901952"/>
+            <a:ext cx="1152144" cy="219456"/>
+          </a:xfrm>
+          <a:prstGeom prst="rect">
+            <a:avLst/>
+          </a:prstGeom>
+          <a:noFill/>
+          <a:ln/>
+        </p:spPr>
+        <p:txBody>
+          <a:bodyPr wrap="square" lIns="0" tIns="0" rIns="0" bIns="0" rtlCol="0" anchor="ctr"/>
+          <a:lstStyle/>
+          <a:p>
+            <a:pPr algn="ctr" indent="0" marL="0">
+              <a:buNone/>
+            </a:pPr>
+            <a:r>
+              <a:rPr lang="en-US" sz="930" b="1" dirty="0">
+                <a:solidFill>
+                  <a:srgbClr val="201409"/>
+                </a:solidFill>
+                <a:latin typeface="Noto Sans KR" pitchFamily="34" charset="0"/>
+                <a:ea typeface="Noto Sans KR" pitchFamily="34" charset="-122"/>
+                <a:cs typeface="Noto Sans KR" pitchFamily="34" charset="-120"/>
+              </a:rPr>
+              <a:t>작업 수행</a:t>
+            </a:r>
+            <a:endParaRPr lang="en-US" sz="930" dirty="0"/>
+          </a:p>
+        </p:txBody>
+      </p:sp>
+      <p:sp>
+        <p:nvSpPr>
+          <p:cNvPr id="28" name="Text 26"/>
+          <p:cNvSpPr/>
+          <p:nvPr/>
+        </p:nvSpPr>
+        <p:spPr>
+          <a:xfrm>
+            <a:off x="4710989" y="2139696"/>
+            <a:ext cx="1115568" cy="329184"/>
+          </a:xfrm>
+          <a:prstGeom prst="rect">
+            <a:avLst/>
+          </a:prstGeom>
+          <a:noFill/>
+          <a:ln/>
+        </p:spPr>
+        <p:txBody>
+          <a:bodyPr wrap="square" lIns="0" tIns="0" rIns="0" bIns="0" rtlCol="0" anchor="t"/>
+          <a:lstStyle/>
+          <a:p>
+            <a:pPr algn="ctr" indent="0" marL="0">
+              <a:lnSpc>
+                <a:spcPct val="120000"/>
+              </a:lnSpc>
+              <a:buNone/>
+            </a:pPr>
+            <a:r>
+              <a:rPr lang="en-US" sz="730" dirty="0">
+                <a:solidFill>
+                  <a:srgbClr val="786A5C"/>
+                </a:solidFill>
+                <a:latin typeface="Noto Sans KR" pitchFamily="34" charset="0"/>
+                <a:ea typeface="Noto Sans KR" pitchFamily="34" charset="-122"/>
+                <a:cs typeface="Noto Sans KR" pitchFamily="34" charset="-120"/>
+              </a:rPr>
+              <a:t>다 이해한 뒤에야</a:t>
+            </a:r>
+            <a:endParaRPr lang="en-US" sz="730" dirty="0"/>
+          </a:p>
+          <a:p>
+            <a:pPr algn="ctr" indent="0" marL="0">
+              <a:lnSpc>
+                <a:spcPct val="120000"/>
+              </a:lnSpc>
+              <a:buNone/>
+            </a:pPr>
+            <a:r>
+              <a:rPr lang="en-US" sz="730" dirty="0">
+                <a:solidFill>
+                  <a:srgbClr val="786A5C"/>
+                </a:solidFill>
+                <a:latin typeface="Noto Sans KR" pitchFamily="34" charset="0"/>
+                <a:ea typeface="Noto Sans KR" pitchFamily="34" charset="-122"/>
+                <a:cs typeface="Noto Sans KR" pitchFamily="34" charset="-120"/>
+              </a:rPr>
+              <a:t>구현 작업 수행</a:t>
+            </a:r>
+            <a:endParaRPr lang="en-US" sz="730" dirty="0"/>
+          </a:p>
+        </p:txBody>
+      </p:sp>
+      <p:sp>
+        <p:nvSpPr>
+          <p:cNvPr id="29" name="Shape 27"/>
+          <p:cNvSpPr/>
+          <p:nvPr/>
+        </p:nvSpPr>
+        <p:spPr>
+          <a:xfrm>
+            <a:off x="5916168" y="2007108"/>
+            <a:ext cx="98755" cy="0"/>
+          </a:xfrm>
+          <a:prstGeom prst="line">
+            <a:avLst/>
+          </a:prstGeom>
+          <a:noFill/>
+          <a:ln w="19050">
+            <a:solidFill>
+              <a:srgbClr val="9A5B28"/>
+            </a:solidFill>
+            <a:prstDash val="solid"/>
+            <a:tailEnd type="triangle"/>
+          </a:ln>
+        </p:spPr>
+      </p:sp>
+      <p:sp>
+        <p:nvSpPr>
+          <p:cNvPr id="30" name="Shape 28"/>
+          <p:cNvSpPr/>
+          <p:nvPr/>
+        </p:nvSpPr>
+        <p:spPr>
+          <a:xfrm>
+            <a:off x="6031382" y="1481328"/>
+            <a:ext cx="1261872" cy="1051560"/>
+          </a:xfrm>
+          <a:prstGeom prst="roundRect">
+            <a:avLst>
+              <a:gd name="adj" fmla="val 7826"/>
+            </a:avLst>
+          </a:prstGeom>
+          <a:solidFill>
+            <a:srgbClr val="F6F1E9"/>
+          </a:solidFill>
+          <a:ln/>
+        </p:spPr>
+      </p:sp>
+      <p:sp>
+        <p:nvSpPr>
+          <p:cNvPr id="31" name="Shape 29"/>
+          <p:cNvSpPr/>
+          <p:nvPr/>
+        </p:nvSpPr>
+        <p:spPr>
+          <a:xfrm>
+            <a:off x="6525158" y="1591056"/>
+            <a:ext cx="274320" cy="274320"/>
+          </a:xfrm>
+          <a:prstGeom prst="ellipse">
+            <a:avLst/>
+          </a:prstGeom>
+          <a:solidFill>
+            <a:srgbClr val="9A5B28"/>
+          </a:solidFill>
+          <a:ln/>
+        </p:spPr>
+      </p:sp>
+      <p:sp>
+        <p:nvSpPr>
+          <p:cNvPr id="32" name="Text 30"/>
+          <p:cNvSpPr/>
+          <p:nvPr/>
+        </p:nvSpPr>
+        <p:spPr>
+          <a:xfrm>
+            <a:off x="6525158" y="1591056"/>
+            <a:ext cx="274320" cy="274320"/>
+          </a:xfrm>
+          <a:prstGeom prst="rect">
+            <a:avLst/>
+          </a:prstGeom>
+          <a:noFill/>
+          <a:ln/>
+        </p:spPr>
+        <p:txBody>
+          <a:bodyPr wrap="square" lIns="0" tIns="0" rIns="0" bIns="0" rtlCol="0" anchor="ctr"/>
+          <a:lstStyle/>
+          <a:p>
+            <a:pPr algn="ctr" indent="0" marL="0">
+              <a:buNone/>
+            </a:pPr>
+            <a:r>
+              <a:rPr lang="en-US" sz="1000" b="1" dirty="0">
+                <a:solidFill>
+                  <a:srgbClr val="FFFFFF"/>
+                </a:solidFill>
+                <a:latin typeface="Noto Sans KR" pitchFamily="34" charset="0"/>
+                <a:ea typeface="Noto Sans KR" pitchFamily="34" charset="-122"/>
+                <a:cs typeface="Noto Sans KR" pitchFamily="34" charset="-120"/>
+              </a:rPr>
+              <a:t>5</a:t>
+            </a:r>
+            <a:endParaRPr lang="en-US" sz="1000" dirty="0"/>
+          </a:p>
+        </p:txBody>
+      </p:sp>
+      <p:sp>
+        <p:nvSpPr>
+          <p:cNvPr id="33" name="Text 31"/>
+          <p:cNvSpPr/>
+          <p:nvPr/>
+        </p:nvSpPr>
+        <p:spPr>
+          <a:xfrm>
+            <a:off x="6086246" y="1901952"/>
+            <a:ext cx="1152144" cy="219456"/>
+          </a:xfrm>
+          <a:prstGeom prst="rect">
+            <a:avLst/>
+          </a:prstGeom>
+          <a:noFill/>
+          <a:ln/>
+        </p:spPr>
+        <p:txBody>
+          <a:bodyPr wrap="square" lIns="0" tIns="0" rIns="0" bIns="0" rtlCol="0" anchor="ctr"/>
+          <a:lstStyle/>
+          <a:p>
+            <a:pPr algn="ctr" indent="0" marL="0">
+              <a:buNone/>
+            </a:pPr>
+            <a:r>
+              <a:rPr lang="en-US" sz="930" b="1" dirty="0">
+                <a:solidFill>
+                  <a:srgbClr val="201409"/>
+                </a:solidFill>
+                <a:latin typeface="Noto Sans KR" pitchFamily="34" charset="0"/>
+                <a:ea typeface="Noto Sans KR" pitchFamily="34" charset="-122"/>
+                <a:cs typeface="Noto Sans KR" pitchFamily="34" charset="-120"/>
+              </a:rPr>
+              <a:t>이해 · 버그 테스트</a:t>
+            </a:r>
+            <a:endParaRPr lang="en-US" sz="930" dirty="0"/>
+          </a:p>
+        </p:txBody>
+      </p:sp>
+      <p:sp>
+        <p:nvSpPr>
+          <p:cNvPr id="34" name="Text 32"/>
+          <p:cNvSpPr/>
+          <p:nvPr/>
+        </p:nvSpPr>
+        <p:spPr>
+          <a:xfrm>
+            <a:off x="6104534" y="2139696"/>
+            <a:ext cx="1115568" cy="329184"/>
+          </a:xfrm>
+          <a:prstGeom prst="rect">
+            <a:avLst/>
+          </a:prstGeom>
+          <a:noFill/>
+          <a:ln/>
+        </p:spPr>
+        <p:txBody>
+          <a:bodyPr wrap="square" lIns="0" tIns="0" rIns="0" bIns="0" rtlCol="0" anchor="t"/>
+          <a:lstStyle/>
+          <a:p>
+            <a:pPr algn="ctr" indent="0" marL="0">
+              <a:lnSpc>
+                <a:spcPct val="120000"/>
+              </a:lnSpc>
+              <a:buNone/>
+            </a:pPr>
+            <a:r>
+              <a:rPr lang="en-US" sz="730" dirty="0">
+                <a:solidFill>
+                  <a:srgbClr val="786A5C"/>
+                </a:solidFill>
+                <a:latin typeface="Noto Sans KR" pitchFamily="34" charset="0"/>
+                <a:ea typeface="Noto Sans KR" pitchFamily="34" charset="-122"/>
+                <a:cs typeface="Noto Sans KR" pitchFamily="34" charset="-120"/>
+              </a:rPr>
+              <a:t>코드 내용 이해 +</a:t>
+            </a:r>
+            <a:endParaRPr lang="en-US" sz="730" dirty="0"/>
+          </a:p>
+          <a:p>
+            <a:pPr algn="ctr" indent="0" marL="0">
+              <a:lnSpc>
+                <a:spcPct val="120000"/>
+              </a:lnSpc>
+              <a:buNone/>
+            </a:pPr>
+            <a:r>
+              <a:rPr lang="en-US" sz="730" dirty="0">
+                <a:solidFill>
+                  <a:srgbClr val="786A5C"/>
+                </a:solidFill>
+                <a:latin typeface="Noto Sans KR" pitchFamily="34" charset="0"/>
+                <a:ea typeface="Noto Sans KR" pitchFamily="34" charset="-122"/>
+                <a:cs typeface="Noto Sans KR" pitchFamily="34" charset="-120"/>
+              </a:rPr>
+              <a:t>검증 스크립트 테스트</a:t>
+            </a:r>
+            <a:endParaRPr lang="en-US" sz="730" dirty="0"/>
+          </a:p>
+        </p:txBody>
+      </p:sp>
+      <p:sp>
+        <p:nvSpPr>
+          <p:cNvPr id="35" name="Shape 33"/>
+          <p:cNvSpPr/>
+          <p:nvPr/>
+        </p:nvSpPr>
+        <p:spPr>
+          <a:xfrm>
+            <a:off x="7309714" y="2007108"/>
+            <a:ext cx="98755" cy="0"/>
+          </a:xfrm>
+          <a:prstGeom prst="line">
+            <a:avLst/>
+          </a:prstGeom>
+          <a:noFill/>
+          <a:ln w="19050">
+            <a:solidFill>
+              <a:srgbClr val="9A5B28"/>
+            </a:solidFill>
+            <a:prstDash val="solid"/>
+            <a:tailEnd type="triangle"/>
+          </a:ln>
+        </p:spPr>
+      </p:sp>
+      <p:sp>
+        <p:nvSpPr>
+          <p:cNvPr id="36" name="Shape 34"/>
+          <p:cNvSpPr/>
+          <p:nvPr/>
+        </p:nvSpPr>
+        <p:spPr>
+          <a:xfrm>
+            <a:off x="7424928" y="1481328"/>
+            <a:ext cx="1261872" cy="1051560"/>
+          </a:xfrm>
+          <a:prstGeom prst="roundRect">
+            <a:avLst>
+              <a:gd name="adj" fmla="val 7826"/>
+            </a:avLst>
+          </a:prstGeom>
+          <a:solidFill>
+            <a:srgbClr val="F1E0C9"/>
+          </a:solidFill>
+          <a:ln w="15240">
+            <a:solidFill>
+              <a:srgbClr val="9A5B28"/>
+            </a:solidFill>
+            <a:prstDash val="solid"/>
+          </a:ln>
+        </p:spPr>
+      </p:sp>
+      <p:sp>
+        <p:nvSpPr>
+          <p:cNvPr id="37" name="Shape 35"/>
+          <p:cNvSpPr/>
+          <p:nvPr/>
+        </p:nvSpPr>
+        <p:spPr>
+          <a:xfrm>
+            <a:off x="7918704" y="1591056"/>
+            <a:ext cx="274320" cy="274320"/>
+          </a:xfrm>
+          <a:prstGeom prst="ellipse">
+            <a:avLst/>
+          </a:prstGeom>
+          <a:solidFill>
+            <a:srgbClr val="9A5B28"/>
+          </a:solidFill>
+          <a:ln/>
+        </p:spPr>
+      </p:sp>
+      <p:sp>
+        <p:nvSpPr>
+          <p:cNvPr id="38" name="Text 36"/>
+          <p:cNvSpPr/>
+          <p:nvPr/>
+        </p:nvSpPr>
+        <p:spPr>
+          <a:xfrm>
+            <a:off x="7918704" y="1591056"/>
+            <a:ext cx="274320" cy="274320"/>
+          </a:xfrm>
+          <a:prstGeom prst="rect">
+            <a:avLst/>
+          </a:prstGeom>
+          <a:noFill/>
+          <a:ln/>
+        </p:spPr>
+        <p:txBody>
+          <a:bodyPr wrap="square" lIns="0" tIns="0" rIns="0" bIns="0" rtlCol="0" anchor="ctr"/>
+          <a:lstStyle/>
+          <a:p>
+            <a:pPr algn="ctr" indent="0" marL="0">
+              <a:buNone/>
+            </a:pPr>
+            <a:r>
+              <a:rPr lang="en-US" sz="1000" b="1" dirty="0">
+                <a:solidFill>
+                  <a:srgbClr val="FFFFFF"/>
+                </a:solidFill>
+                <a:latin typeface="Noto Sans KR" pitchFamily="34" charset="0"/>
+                <a:ea typeface="Noto Sans KR" pitchFamily="34" charset="-122"/>
+                <a:cs typeface="Noto Sans KR" pitchFamily="34" charset="-120"/>
+              </a:rPr>
+              <a:t>6</a:t>
+            </a:r>
+            <a:endParaRPr lang="en-US" sz="1000" dirty="0"/>
+          </a:p>
+        </p:txBody>
+      </p:sp>
+      <p:sp>
+        <p:nvSpPr>
+          <p:cNvPr id="39" name="Text 37"/>
+          <p:cNvSpPr/>
+          <p:nvPr/>
+        </p:nvSpPr>
+        <p:spPr>
+          <a:xfrm>
+            <a:off x="7479792" y="1901952"/>
+            <a:ext cx="1152144" cy="219456"/>
+          </a:xfrm>
+          <a:prstGeom prst="rect">
+            <a:avLst/>
+          </a:prstGeom>
+          <a:noFill/>
+          <a:ln/>
+        </p:spPr>
+        <p:txBody>
+          <a:bodyPr wrap="square" lIns="0" tIns="0" rIns="0" bIns="0" rtlCol="0" anchor="ctr"/>
+          <a:lstStyle/>
+          <a:p>
+            <a:pPr algn="ctr" indent="0" marL="0">
+              <a:buNone/>
+            </a:pPr>
+            <a:r>
+              <a:rPr lang="en-US" sz="930" b="1" dirty="0">
+                <a:solidFill>
+                  <a:srgbClr val="201409"/>
+                </a:solidFill>
+                <a:latin typeface="Noto Sans KR" pitchFamily="34" charset="0"/>
+                <a:ea typeface="Noto Sans KR" pitchFamily="34" charset="-122"/>
+                <a:cs typeface="Noto Sans KR" pitchFamily="34" charset="-120"/>
+              </a:rPr>
+              <a:t>커밋</a:t>
+            </a:r>
+            <a:endParaRPr lang="en-US" sz="930" dirty="0"/>
+          </a:p>
+        </p:txBody>
+      </p:sp>
+      <p:sp>
+        <p:nvSpPr>
+          <p:cNvPr id="40" name="Text 38"/>
+          <p:cNvSpPr/>
+          <p:nvPr/>
+        </p:nvSpPr>
+        <p:spPr>
+          <a:xfrm>
+            <a:off x="7498080" y="2139696"/>
+            <a:ext cx="1115568" cy="329184"/>
+          </a:xfrm>
+          <a:prstGeom prst="rect">
+            <a:avLst/>
+          </a:prstGeom>
+          <a:noFill/>
+          <a:ln/>
+        </p:spPr>
+        <p:txBody>
+          <a:bodyPr wrap="square" lIns="0" tIns="0" rIns="0" bIns="0" rtlCol="0" anchor="t"/>
+          <a:lstStyle/>
+          <a:p>
+            <a:pPr algn="ctr" indent="0" marL="0">
+              <a:lnSpc>
+                <a:spcPct val="120000"/>
+              </a:lnSpc>
+              <a:buNone/>
+            </a:pPr>
+            <a:r>
+              <a:rPr lang="en-US" sz="730" dirty="0">
+                <a:solidFill>
+                  <a:srgbClr val="786A5C"/>
+                </a:solidFill>
+                <a:latin typeface="Noto Sans KR" pitchFamily="34" charset="0"/>
+                <a:ea typeface="Noto Sans KR" pitchFamily="34" charset="-122"/>
+                <a:cs typeface="Noto Sans KR" pitchFamily="34" charset="-120"/>
+              </a:rPr>
+              <a:t>commit 스킬로</a:t>
+            </a:r>
+            <a:endParaRPr lang="en-US" sz="730" dirty="0"/>
+          </a:p>
+          <a:p>
+            <a:pPr algn="ctr" indent="0" marL="0">
+              <a:lnSpc>
+                <a:spcPct val="120000"/>
+              </a:lnSpc>
+              <a:buNone/>
+            </a:pPr>
+            <a:r>
+              <a:rPr lang="en-US" sz="730" dirty="0">
+                <a:solidFill>
+                  <a:srgbClr val="786A5C"/>
+                </a:solidFill>
+                <a:latin typeface="Noto Sans KR" pitchFamily="34" charset="0"/>
+                <a:ea typeface="Noto Sans KR" pitchFamily="34" charset="-122"/>
+                <a:cs typeface="Noto Sans KR" pitchFamily="34" charset="-120"/>
+              </a:rPr>
+              <a:t>파일 단위 커밋</a:t>
+            </a:r>
+            <a:endParaRPr lang="en-US" sz="730" dirty="0"/>
+          </a:p>
+        </p:txBody>
+      </p:sp>
+      <p:sp>
+        <p:nvSpPr>
+          <p:cNvPr id="41" name="Text 39"/>
+          <p:cNvSpPr/>
+          <p:nvPr/>
+        </p:nvSpPr>
+        <p:spPr>
+          <a:xfrm>
+            <a:off x="457200" y="2697480"/>
+            <a:ext cx="4160520" cy="256032"/>
+          </a:xfrm>
+          <a:prstGeom prst="rect">
+            <a:avLst/>
+          </a:prstGeom>
+          <a:noFill/>
+          <a:ln/>
+        </p:spPr>
+        <p:txBody>
+          <a:bodyPr wrap="square" lIns="0" tIns="0" rIns="0" bIns="0" rtlCol="0" anchor="ctr"/>
+          <a:lstStyle/>
+          <a:p>
+            <a:pPr algn="l" indent="0" marL="0">
+              <a:buNone/>
+            </a:pPr>
+            <a:r>
+              <a:rPr lang="en-US" sz="1150" b="1" dirty="0">
+                <a:solidFill>
+                  <a:srgbClr val="201409"/>
+                </a:solidFill>
+                <a:latin typeface="Noto Sans KR" pitchFamily="34" charset="0"/>
+                <a:ea typeface="Noto Sans KR" pitchFamily="34" charset="-122"/>
+                <a:cs typeface="Noto Sans KR" pitchFamily="34" charset="-120"/>
+              </a:rPr>
+              <a:t>쓰는 Skill 3개  (.claude/skills/)</a:t>
+            </a:r>
+            <a:endParaRPr lang="en-US" sz="1150" dirty="0"/>
+          </a:p>
+        </p:txBody>
+      </p:sp>
+      <p:sp>
+        <p:nvSpPr>
+          <p:cNvPr id="42" name="Shape 40"/>
+          <p:cNvSpPr/>
+          <p:nvPr/>
+        </p:nvSpPr>
+        <p:spPr>
+          <a:xfrm>
+            <a:off x="457200" y="2999232"/>
+            <a:ext cx="4160520" cy="566928"/>
+          </a:xfrm>
+          <a:prstGeom prst="roundRect">
+            <a:avLst>
+              <a:gd name="adj" fmla="val 12903"/>
+            </a:avLst>
+          </a:prstGeom>
+          <a:solidFill>
+            <a:srgbClr val="F6F1E9"/>
+          </a:solidFill>
+          <a:ln/>
+        </p:spPr>
+      </p:sp>
+      <p:sp>
+        <p:nvSpPr>
+          <p:cNvPr id="43" name="Shape 41"/>
+          <p:cNvSpPr/>
+          <p:nvPr/>
+        </p:nvSpPr>
+        <p:spPr>
+          <a:xfrm>
+            <a:off x="457200" y="2999232"/>
+            <a:ext cx="64008" cy="566928"/>
+          </a:xfrm>
+          <a:prstGeom prst="rect">
+            <a:avLst/>
+          </a:prstGeom>
+          <a:solidFill>
+            <a:srgbClr val="9A5B28"/>
+          </a:solidFill>
+          <a:ln/>
+        </p:spPr>
+      </p:sp>
+      <p:sp>
+        <p:nvSpPr>
+          <p:cNvPr id="44" name="Text 42"/>
+          <p:cNvSpPr/>
+          <p:nvPr/>
+        </p:nvSpPr>
+        <p:spPr>
+          <a:xfrm>
+            <a:off x="621792" y="3054096"/>
+            <a:ext cx="3840480" cy="201168"/>
+          </a:xfrm>
+          <a:prstGeom prst="rect">
+            <a:avLst/>
+          </a:prstGeom>
+          <a:noFill/>
+          <a:ln/>
+        </p:spPr>
+        <p:txBody>
+          <a:bodyPr wrap="square" lIns="0" tIns="0" rIns="0" bIns="0" rtlCol="0" anchor="ctr"/>
+          <a:lstStyle/>
+          <a:p>
+            <a:pPr algn="l" indent="0" marL="0">
+              <a:buNone/>
+            </a:pPr>
+            <a:r>
+              <a:rPr lang="en-US" sz="1000" b="1" dirty="0">
+                <a:solidFill>
+                  <a:srgbClr val="7A4720"/>
+                </a:solidFill>
+                <a:latin typeface="Consolas" pitchFamily="34" charset="0"/>
+                <a:ea typeface="Consolas" pitchFamily="34" charset="-122"/>
+                <a:cs typeface="Consolas" pitchFamily="34" charset="-120"/>
+              </a:rPr>
+              <a:t>/commit</a:t>
+            </a:r>
+            <a:endParaRPr lang="en-US" sz="1000" dirty="0"/>
+          </a:p>
+        </p:txBody>
+      </p:sp>
+      <p:sp>
+        <p:nvSpPr>
+          <p:cNvPr id="45" name="Text 43"/>
+          <p:cNvSpPr/>
+          <p:nvPr/>
+        </p:nvSpPr>
+        <p:spPr>
+          <a:xfrm>
+            <a:off x="621792" y="3255264"/>
+            <a:ext cx="3886200" cy="274320"/>
+          </a:xfrm>
+          <a:prstGeom prst="rect">
+            <a:avLst/>
+          </a:prstGeom>
+          <a:noFill/>
+          <a:ln/>
+        </p:spPr>
+        <p:txBody>
+          <a:bodyPr wrap="square" lIns="0" tIns="0" rIns="0" bIns="0" rtlCol="0" anchor="t"/>
+          <a:lstStyle/>
+          <a:p>
+            <a:pPr algn="l" indent="0" marL="0">
+              <a:lnSpc>
+                <a:spcPct val="118000"/>
+              </a:lnSpc>
+              <a:buNone/>
+            </a:pPr>
+            <a:r>
+              <a:rPr lang="en-US" sz="780" dirty="0">
+                <a:solidFill>
+                  <a:srgbClr val="786A5C"/>
+                </a:solidFill>
+                <a:latin typeface="Noto Sans KR" pitchFamily="34" charset="0"/>
+                <a:ea typeface="Noto Sans KR" pitchFamily="34" charset="-122"/>
+                <a:cs typeface="Noto Sans KR" pitchFamily="34" charset="-120"/>
+              </a:rPr>
+              <a:t>"커밋" 한마디로 바로 실행 — Conventional Commits</a:t>
+            </a:r>
+            <a:endParaRPr lang="en-US" sz="780" dirty="0"/>
+          </a:p>
+          <a:p>
+            <a:pPr algn="l" indent="0" marL="0">
+              <a:lnSpc>
+                <a:spcPct val="118000"/>
+              </a:lnSpc>
+              <a:buNone/>
+            </a:pPr>
+            <a:r>
+              <a:rPr lang="en-US" sz="780" dirty="0">
+                <a:solidFill>
+                  <a:srgbClr val="786A5C"/>
+                </a:solidFill>
+                <a:latin typeface="Noto Sans KR" pitchFamily="34" charset="0"/>
+                <a:ea typeface="Noto Sans KR" pitchFamily="34" charset="-122"/>
+                <a:cs typeface="Noto Sans KR" pitchFamily="34" charset="-120"/>
+              </a:rPr>
+              <a:t>한국어 형식, 파일 하나당 커밋 하나로 분리</a:t>
+            </a:r>
+            <a:endParaRPr lang="en-US" sz="780" dirty="0"/>
+          </a:p>
+        </p:txBody>
+      </p:sp>
+      <p:sp>
+        <p:nvSpPr>
+          <p:cNvPr id="46" name="Shape 44"/>
+          <p:cNvSpPr/>
+          <p:nvPr/>
+        </p:nvSpPr>
+        <p:spPr>
+          <a:xfrm>
+            <a:off x="457200" y="3657600"/>
+            <a:ext cx="4160520" cy="566928"/>
+          </a:xfrm>
+          <a:prstGeom prst="roundRect">
+            <a:avLst>
+              <a:gd name="adj" fmla="val 12903"/>
+            </a:avLst>
+          </a:prstGeom>
+          <a:solidFill>
+            <a:srgbClr val="F6F1E9"/>
+          </a:solidFill>
+          <a:ln/>
+        </p:spPr>
+      </p:sp>
+      <p:sp>
+        <p:nvSpPr>
+          <p:cNvPr id="47" name="Shape 45"/>
+          <p:cNvSpPr/>
+          <p:nvPr/>
+        </p:nvSpPr>
+        <p:spPr>
+          <a:xfrm>
+            <a:off x="457200" y="3657600"/>
+            <a:ext cx="64008" cy="566928"/>
+          </a:xfrm>
+          <a:prstGeom prst="rect">
+            <a:avLst/>
+          </a:prstGeom>
+          <a:solidFill>
+            <a:srgbClr val="9A5B28"/>
+          </a:solidFill>
+          <a:ln/>
+        </p:spPr>
+      </p:sp>
+      <p:sp>
+        <p:nvSpPr>
+          <p:cNvPr id="48" name="Text 46"/>
+          <p:cNvSpPr/>
+          <p:nvPr/>
+        </p:nvSpPr>
+        <p:spPr>
+          <a:xfrm>
+            <a:off x="621792" y="3712464"/>
+            <a:ext cx="3840480" cy="201168"/>
+          </a:xfrm>
+          <a:prstGeom prst="rect">
+            <a:avLst/>
+          </a:prstGeom>
+          <a:noFill/>
+          <a:ln/>
+        </p:spPr>
+        <p:txBody>
+          <a:bodyPr wrap="square" lIns="0" tIns="0" rIns="0" bIns="0" rtlCol="0" anchor="ctr"/>
+          <a:lstStyle/>
+          <a:p>
+            <a:pPr algn="l" indent="0" marL="0">
+              <a:buNone/>
+            </a:pPr>
+            <a:r>
+              <a:rPr lang="en-US" sz="1000" b="1" dirty="0">
+                <a:solidFill>
+                  <a:srgbClr val="7A4720"/>
+                </a:solidFill>
+                <a:latin typeface="Consolas" pitchFamily="34" charset="0"/>
+                <a:ea typeface="Consolas" pitchFamily="34" charset="-122"/>
+                <a:cs typeface="Consolas" pitchFamily="34" charset="-120"/>
+              </a:rPr>
+              <a:t>/new-component</a:t>
+            </a:r>
+            <a:endParaRPr lang="en-US" sz="1000" dirty="0"/>
+          </a:p>
+        </p:txBody>
+      </p:sp>
+      <p:sp>
+        <p:nvSpPr>
+          <p:cNvPr id="49" name="Text 47"/>
+          <p:cNvSpPr/>
+          <p:nvPr/>
+        </p:nvSpPr>
+        <p:spPr>
+          <a:xfrm>
+            <a:off x="621792" y="3913632"/>
+            <a:ext cx="3886200" cy="274320"/>
+          </a:xfrm>
+          <a:prstGeom prst="rect">
+            <a:avLst/>
+          </a:prstGeom>
+          <a:noFill/>
+          <a:ln/>
+        </p:spPr>
+        <p:txBody>
+          <a:bodyPr wrap="square" lIns="0" tIns="0" rIns="0" bIns="0" rtlCol="0" anchor="t"/>
+          <a:lstStyle/>
+          <a:p>
+            <a:pPr algn="l" indent="0" marL="0">
+              <a:lnSpc>
+                <a:spcPct val="118000"/>
+              </a:lnSpc>
+              <a:buNone/>
+            </a:pPr>
+            <a:r>
+              <a:rPr lang="en-US" sz="780" dirty="0">
+                <a:solidFill>
+                  <a:srgbClr val="786A5C"/>
+                </a:solidFill>
+                <a:latin typeface="Noto Sans KR" pitchFamily="34" charset="0"/>
+                <a:ea typeface="Noto Sans KR" pitchFamily="34" charset="-122"/>
+                <a:cs typeface="Noto Sans KR" pitchFamily="34" charset="-120"/>
+              </a:rPr>
+              <a:t>새 컴포넌트 요청 시 CLAUDE.md·디자인.md를 먼저 읽고</a:t>
+            </a:r>
+            <a:endParaRPr lang="en-US" sz="780" dirty="0"/>
+          </a:p>
+          <a:p>
+            <a:pPr algn="l" indent="0" marL="0">
+              <a:lnSpc>
+                <a:spcPct val="118000"/>
+              </a:lnSpc>
+              <a:buNone/>
+            </a:pPr>
+            <a:r>
+              <a:rPr lang="en-US" sz="780" dirty="0">
+                <a:solidFill>
+                  <a:srgbClr val="786A5C"/>
+                </a:solidFill>
+                <a:latin typeface="Noto Sans KR" pitchFamily="34" charset="0"/>
+                <a:ea typeface="Noto Sans KR" pitchFamily="34" charset="-122"/>
+                <a:cs typeface="Noto Sans KR" pitchFamily="34" charset="-120"/>
+              </a:rPr>
+              <a:t>디자인 토큰 재사용, 문서에 없으면 임의로 안 정하고 질문</a:t>
+            </a:r>
+            <a:endParaRPr lang="en-US" sz="780" dirty="0"/>
+          </a:p>
+        </p:txBody>
+      </p:sp>
+      <p:sp>
+        <p:nvSpPr>
+          <p:cNvPr id="50" name="Shape 48"/>
+          <p:cNvSpPr/>
+          <p:nvPr/>
+        </p:nvSpPr>
+        <p:spPr>
+          <a:xfrm>
+            <a:off x="457200" y="4315968"/>
+            <a:ext cx="4160520" cy="566928"/>
+          </a:xfrm>
+          <a:prstGeom prst="roundRect">
+            <a:avLst>
+              <a:gd name="adj" fmla="val 12903"/>
+            </a:avLst>
+          </a:prstGeom>
+          <a:solidFill>
+            <a:srgbClr val="F6F1E9"/>
+          </a:solidFill>
+          <a:ln/>
+        </p:spPr>
+      </p:sp>
+      <p:sp>
+        <p:nvSpPr>
+          <p:cNvPr id="51" name="Shape 49"/>
+          <p:cNvSpPr/>
+          <p:nvPr/>
+        </p:nvSpPr>
+        <p:spPr>
+          <a:xfrm>
+            <a:off x="457200" y="4315968"/>
+            <a:ext cx="64008" cy="566928"/>
+          </a:xfrm>
+          <a:prstGeom prst="rect">
+            <a:avLst/>
+          </a:prstGeom>
+          <a:solidFill>
+            <a:srgbClr val="9A5B28"/>
+          </a:solidFill>
+          <a:ln/>
+        </p:spPr>
+      </p:sp>
+      <p:sp>
+        <p:nvSpPr>
+          <p:cNvPr id="52" name="Text 50"/>
+          <p:cNvSpPr/>
+          <p:nvPr/>
+        </p:nvSpPr>
+        <p:spPr>
+          <a:xfrm>
+            <a:off x="621792" y="4370832"/>
+            <a:ext cx="3840480" cy="201168"/>
+          </a:xfrm>
+          <a:prstGeom prst="rect">
+            <a:avLst/>
+          </a:prstGeom>
+          <a:noFill/>
+          <a:ln/>
+        </p:spPr>
+        <p:txBody>
+          <a:bodyPr wrap="square" lIns="0" tIns="0" rIns="0" bIns="0" rtlCol="0" anchor="ctr"/>
+          <a:lstStyle/>
+          <a:p>
+            <a:pPr algn="l" indent="0" marL="0">
+              <a:buNone/>
+            </a:pPr>
+            <a:r>
+              <a:rPr lang="en-US" sz="1000" b="1" dirty="0">
+                <a:solidFill>
+                  <a:srgbClr val="7A4720"/>
+                </a:solidFill>
+                <a:latin typeface="Consolas" pitchFamily="34" charset="0"/>
+                <a:ea typeface="Consolas" pitchFamily="34" charset="-122"/>
+                <a:cs typeface="Consolas" pitchFamily="34" charset="-120"/>
+              </a:rPr>
+              <a:t>/daily-recap</a:t>
+            </a:r>
+            <a:endParaRPr lang="en-US" sz="1000" dirty="0"/>
+          </a:p>
+        </p:txBody>
+      </p:sp>
+      <p:sp>
+        <p:nvSpPr>
+          <p:cNvPr id="53" name="Text 51"/>
+          <p:cNvSpPr/>
+          <p:nvPr/>
+        </p:nvSpPr>
+        <p:spPr>
+          <a:xfrm>
+            <a:off x="621792" y="4572000"/>
+            <a:ext cx="3886200" cy="274320"/>
+          </a:xfrm>
+          <a:prstGeom prst="rect">
+            <a:avLst/>
+          </a:prstGeom>
+          <a:noFill/>
+          <a:ln/>
+        </p:spPr>
+        <p:txBody>
+          <a:bodyPr wrap="square" lIns="0" tIns="0" rIns="0" bIns="0" rtlCol="0" anchor="t"/>
+          <a:lstStyle/>
+          <a:p>
+            <a:pPr algn="l" indent="0" marL="0">
+              <a:lnSpc>
+                <a:spcPct val="118000"/>
+              </a:lnSpc>
+              <a:buNone/>
+            </a:pPr>
+            <a:r>
+              <a:rPr lang="en-US" sz="780" dirty="0">
+                <a:solidFill>
+                  <a:srgbClr val="786A5C"/>
+                </a:solidFill>
+                <a:latin typeface="Noto Sans KR" pitchFamily="34" charset="0"/>
+                <a:ea typeface="Noto Sans KR" pitchFamily="34" charset="-122"/>
+                <a:cs typeface="Noto Sans KR" pitchFamily="34" charset="-120"/>
+              </a:rPr>
+              <a:t>하루 마무리 회고 — 한 일·목적·세부사항·</a:t>
+            </a:r>
+            <a:endParaRPr lang="en-US" sz="780" dirty="0"/>
+          </a:p>
+          <a:p>
+            <a:pPr algn="l" indent="0" marL="0">
+              <a:lnSpc>
+                <a:spcPct val="118000"/>
+              </a:lnSpc>
+              <a:buNone/>
+            </a:pPr>
+            <a:r>
+              <a:rPr lang="en-US" sz="780" dirty="0">
+                <a:solidFill>
+                  <a:srgbClr val="786A5C"/>
+                </a:solidFill>
+                <a:latin typeface="Noto Sans KR" pitchFamily="34" charset="0"/>
+                <a:ea typeface="Noto Sans KR" pitchFamily="34" charset="-122"/>
+                <a:cs typeface="Noto Sans KR" pitchFamily="34" charset="-120"/>
+              </a:rPr>
+              <a:t>헷갈린 점·배운 것 5가지를 표로</a:t>
+            </a:r>
+            <a:endParaRPr lang="en-US" sz="780" dirty="0"/>
+          </a:p>
+        </p:txBody>
+      </p:sp>
+      <p:sp>
+        <p:nvSpPr>
+          <p:cNvPr id="54" name="Text 52"/>
+          <p:cNvSpPr/>
+          <p:nvPr/>
+        </p:nvSpPr>
+        <p:spPr>
+          <a:xfrm>
+            <a:off x="4892040" y="2697480"/>
+            <a:ext cx="3794760" cy="256032"/>
+          </a:xfrm>
+          <a:prstGeom prst="rect">
+            <a:avLst/>
+          </a:prstGeom>
+          <a:noFill/>
+          <a:ln/>
+        </p:spPr>
+        <p:txBody>
+          <a:bodyPr wrap="square" lIns="0" tIns="0" rIns="0" bIns="0" rtlCol="0" anchor="ctr"/>
+          <a:lstStyle/>
+          <a:p>
+            <a:pPr algn="l" indent="0" marL="0">
+              <a:buNone/>
+            </a:pPr>
+            <a:r>
+              <a:rPr lang="en-US" sz="1150" b="1" dirty="0">
+                <a:solidFill>
+                  <a:srgbClr val="201409"/>
+                </a:solidFill>
+                <a:latin typeface="Noto Sans KR" pitchFamily="34" charset="0"/>
+                <a:ea typeface="Noto Sans KR" pitchFamily="34" charset="-122"/>
+                <a:cs typeface="Noto Sans KR" pitchFamily="34" charset="-120"/>
+              </a:rPr>
+              <a:t>Agent · 함께 정한 규칙</a:t>
+            </a:r>
+            <a:endParaRPr lang="en-US" sz="1150" dirty="0"/>
+          </a:p>
+        </p:txBody>
+      </p:sp>
+      <p:sp>
+        <p:nvSpPr>
+          <p:cNvPr id="55" name="Shape 53"/>
+          <p:cNvSpPr/>
+          <p:nvPr/>
+        </p:nvSpPr>
+        <p:spPr>
+          <a:xfrm>
+            <a:off x="4892040" y="2999232"/>
+            <a:ext cx="3794760" cy="914400"/>
+          </a:xfrm>
+          <a:prstGeom prst="roundRect">
+            <a:avLst>
+              <a:gd name="adj" fmla="val 8000"/>
+            </a:avLst>
+          </a:prstGeom>
+          <a:solidFill>
+            <a:srgbClr val="F6F1E9"/>
+          </a:solidFill>
+          <a:ln/>
+        </p:spPr>
+      </p:sp>
+      <p:sp>
+        <p:nvSpPr>
+          <p:cNvPr id="56" name="Text 54"/>
+          <p:cNvSpPr/>
+          <p:nvPr/>
+        </p:nvSpPr>
+        <p:spPr>
+          <a:xfrm>
+            <a:off x="5074920" y="3072384"/>
+            <a:ext cx="3474720" cy="219456"/>
+          </a:xfrm>
+          <a:prstGeom prst="rect">
+            <a:avLst/>
+          </a:prstGeom>
+          <a:noFill/>
+          <a:ln/>
+        </p:spPr>
+        <p:txBody>
+          <a:bodyPr wrap="square" lIns="0" tIns="0" rIns="0" bIns="0" rtlCol="0" anchor="ctr"/>
+          <a:lstStyle/>
+          <a:p>
+            <a:pPr algn="l" indent="0" marL="0">
+              <a:buNone/>
+            </a:pPr>
+            <a:r>
+              <a:rPr lang="en-US" sz="930" b="1" dirty="0">
+                <a:solidFill>
+                  <a:srgbClr val="201409"/>
+                </a:solidFill>
+                <a:latin typeface="Noto Sans KR" pitchFamily="34" charset="0"/>
+                <a:ea typeface="Noto Sans KR" pitchFamily="34" charset="-122"/>
+                <a:cs typeface="Noto Sans KR" pitchFamily="34" charset="-120"/>
+              </a:rPr>
+              <a:t>Agent — 기본은 메인 세션에서 직접 진행</a:t>
+            </a:r>
+            <a:endParaRPr lang="en-US" sz="930" dirty="0"/>
+          </a:p>
+        </p:txBody>
+      </p:sp>
+      <p:sp>
+        <p:nvSpPr>
+          <p:cNvPr id="57" name="Text 55"/>
+          <p:cNvSpPr/>
+          <p:nvPr/>
+        </p:nvSpPr>
+        <p:spPr>
+          <a:xfrm>
+            <a:off x="5074920" y="3328416"/>
+            <a:ext cx="3474720" cy="512064"/>
+          </a:xfrm>
+          <a:prstGeom prst="rect">
+            <a:avLst/>
+          </a:prstGeom>
+          <a:noFill/>
+          <a:ln/>
+        </p:spPr>
+        <p:txBody>
+          <a:bodyPr wrap="square" lIns="0" tIns="0" rIns="0" bIns="0" rtlCol="0" anchor="t"/>
+          <a:lstStyle/>
+          <a:p>
+            <a:pPr algn="l" indent="0" marL="0">
+              <a:lnSpc>
+                <a:spcPct val="130000"/>
+              </a:lnSpc>
+              <a:buNone/>
+            </a:pPr>
+            <a:r>
+              <a:rPr lang="en-US" sz="820" dirty="0">
+                <a:solidFill>
+                  <a:srgbClr val="786A5C"/>
+                </a:solidFill>
+                <a:latin typeface="Noto Sans KR" pitchFamily="34" charset="0"/>
+                <a:ea typeface="Noto Sans KR" pitchFamily="34" charset="-122"/>
+                <a:cs typeface="Noto Sans KR" pitchFamily="34" charset="-120"/>
+              </a:rPr>
+              <a:t>· Explore — 여러 파일을 한 번에 훑어야 할 때 코드베이스 탐색</a:t>
+            </a:r>
+            <a:endParaRPr lang="en-US" sz="820" dirty="0"/>
+          </a:p>
+          <a:p>
+            <a:pPr algn="l" indent="0" marL="0">
+              <a:lnSpc>
+                <a:spcPct val="130000"/>
+              </a:lnSpc>
+              <a:buNone/>
+            </a:pPr>
+            <a:r>
+              <a:rPr lang="en-US" sz="820" dirty="0">
+                <a:solidFill>
+                  <a:srgbClr val="786A5C"/>
+                </a:solidFill>
+                <a:latin typeface="Noto Sans KR" pitchFamily="34" charset="0"/>
+                <a:ea typeface="Noto Sans KR" pitchFamily="34" charset="-122"/>
+                <a:cs typeface="Noto Sans KR" pitchFamily="34" charset="-120"/>
+              </a:rPr>
+              <a:t>· Plan — 구현 전에 단계별 계획을 먼저 받아볼 때</a:t>
+            </a:r>
+            <a:endParaRPr lang="en-US" sz="820" dirty="0"/>
+          </a:p>
+        </p:txBody>
+      </p:sp>
+      <p:sp>
+        <p:nvSpPr>
+          <p:cNvPr id="58" name="Shape 56"/>
+          <p:cNvSpPr/>
+          <p:nvPr/>
+        </p:nvSpPr>
+        <p:spPr>
+          <a:xfrm>
+            <a:off x="4892040" y="4023360"/>
+            <a:ext cx="3794760" cy="864108"/>
+          </a:xfrm>
+          <a:prstGeom prst="roundRect">
+            <a:avLst>
+              <a:gd name="adj" fmla="val 8466"/>
+            </a:avLst>
+          </a:prstGeom>
+          <a:solidFill>
+            <a:srgbClr val="F1E0C9"/>
+          </a:solidFill>
+          <a:ln/>
+        </p:spPr>
+      </p:sp>
+      <p:sp>
+        <p:nvSpPr>
+          <p:cNvPr id="59" name="Text 57"/>
+          <p:cNvSpPr/>
+          <p:nvPr/>
+        </p:nvSpPr>
+        <p:spPr>
+          <a:xfrm>
+            <a:off x="5074920" y="4096512"/>
+            <a:ext cx="3474720" cy="219456"/>
+          </a:xfrm>
+          <a:prstGeom prst="rect">
+            <a:avLst/>
+          </a:prstGeom>
+          <a:noFill/>
+          <a:ln/>
+        </p:spPr>
+        <p:txBody>
+          <a:bodyPr wrap="square" lIns="0" tIns="0" rIns="0" bIns="0" rtlCol="0" anchor="ctr"/>
+          <a:lstStyle/>
+          <a:p>
+            <a:pPr algn="l" indent="0" marL="0">
+              <a:buNone/>
+            </a:pPr>
+            <a:r>
+              <a:rPr lang="en-US" sz="930" b="1" dirty="0">
+                <a:solidFill>
+                  <a:srgbClr val="7A4720"/>
+                </a:solidFill>
+                <a:latin typeface="Noto Sans KR" pitchFamily="34" charset="0"/>
+                <a:ea typeface="Noto Sans KR" pitchFamily="34" charset="-122"/>
+                <a:cs typeface="Noto Sans KR" pitchFamily="34" charset="-120"/>
+              </a:rPr>
+              <a:t>함께 정한 규칙 — CLAUDE.md에 적어둔 것</a:t>
+            </a:r>
+            <a:endParaRPr lang="en-US" sz="930" dirty="0"/>
+          </a:p>
+        </p:txBody>
+      </p:sp>
+      <p:sp>
+        <p:nvSpPr>
+          <p:cNvPr id="60" name="Text 58"/>
+          <p:cNvSpPr/>
+          <p:nvPr/>
+        </p:nvSpPr>
+        <p:spPr>
+          <a:xfrm>
+            <a:off x="5074920" y="4343400"/>
+            <a:ext cx="3474720" cy="480060"/>
+          </a:xfrm>
+          <a:prstGeom prst="rect">
+            <a:avLst/>
+          </a:prstGeom>
+          <a:noFill/>
+          <a:ln/>
+        </p:spPr>
+        <p:txBody>
+          <a:bodyPr wrap="square" lIns="0" tIns="0" rIns="0" bIns="0" rtlCol="0" anchor="t"/>
+          <a:lstStyle/>
+          <a:p>
+            <a:pPr algn="l" indent="0" marL="0">
+              <a:lnSpc>
+                <a:spcPct val="124000"/>
+              </a:lnSpc>
+              <a:buNone/>
+            </a:pPr>
+            <a:r>
+              <a:rPr lang="en-US" sz="820" dirty="0">
+                <a:solidFill>
+                  <a:srgbClr val="7A4720"/>
+                </a:solidFill>
+                <a:latin typeface="Noto Sans KR" pitchFamily="34" charset="0"/>
+                <a:ea typeface="Noto Sans KR" pitchFamily="34" charset="-122"/>
+                <a:cs typeface="Noto Sans KR" pitchFamily="34" charset="-120"/>
+              </a:rPr>
+              <a:t>· 지시하지 않은 작업은 AI가 스스로 실행하지 않기</a:t>
+            </a:r>
+            <a:endParaRPr lang="en-US" sz="820" dirty="0"/>
+          </a:p>
+          <a:p>
+            <a:pPr algn="l" indent="0" marL="0">
+              <a:lnSpc>
+                <a:spcPct val="124000"/>
+              </a:lnSpc>
+              <a:buNone/>
+            </a:pPr>
+            <a:r>
+              <a:rPr lang="en-US" sz="820" dirty="0">
+                <a:solidFill>
+                  <a:srgbClr val="7A4720"/>
+                </a:solidFill>
+                <a:latin typeface="Noto Sans KR" pitchFamily="34" charset="0"/>
+                <a:ea typeface="Noto Sans KR" pitchFamily="34" charset="-122"/>
+                <a:cs typeface="Noto Sans KR" pitchFamily="34" charset="-120"/>
+              </a:rPr>
+              <a:t>· 빈틈은 임의로 채우지 말고 다시 질문하기</a:t>
+            </a:r>
+            <a:endParaRPr lang="en-US" sz="820" dirty="0"/>
+          </a:p>
+          <a:p>
+            <a:pPr algn="l" indent="0" marL="0">
+              <a:lnSpc>
+                <a:spcPct val="124000"/>
+              </a:lnSpc>
+              <a:buNone/>
+            </a:pPr>
+            <a:r>
+              <a:rPr lang="en-US" sz="820" dirty="0">
+                <a:solidFill>
+                  <a:srgbClr val="7A4720"/>
+                </a:solidFill>
+                <a:latin typeface="Noto Sans KR" pitchFamily="34" charset="0"/>
+                <a:ea typeface="Noto Sans KR" pitchFamily="34" charset="-122"/>
+                <a:cs typeface="Noto Sans KR" pitchFamily="34" charset="-120"/>
+              </a:rPr>
+              <a:t>· 코드 설명은 목적 → 방식 → 근거 → 구현 4단계로</a:t>
+            </a:r>
+            <a:endParaRPr lang="en-US" sz="820" dirty="0"/>
+          </a:p>
+        </p:txBody>
+      </p:sp>
+    </p:spTree>
+  </p:cSld>
+  <p:clrMapOvr>
+    <a:masterClrMapping/>
+  </p:clrMapOvr>
+</p:sld>
+</file>
+
+<file path=ppt/slides/slide12.xml><?xml version="1.0" encoding="utf-8"?>
+<p:sld xmlns:a="http://schemas.openxmlformats.org/drawingml/2006/main" xmlns:r="http://schemas.openxmlformats.org/officeDocument/2006/relationships" xmlns:p="http://schemas.openxmlformats.org/presentationml/2006/main">
+  <p:cSld name="Slide 12">
+    <p:bg>
+      <p:bgPr>
+        <a:solidFill>
+          <a:srgbClr val="FFFFFF"/>
+        </a:solidFill>
+      </p:bgPr>
+    </p:bg>
+    <p:spTree>
+      <p:nvGrpSpPr>
+        <p:cNvPr id="1" name=""/>
+        <p:cNvGrpSpPr/>
+        <p:nvPr/>
+      </p:nvGrpSpPr>
+      <p:grpSpPr>
+        <a:xfrm>
+          <a:off x="0" y="0"/>
+          <a:ext cx="0" cy="0"/>
+          <a:chOff x="0" y="0"/>
+          <a:chExt cx="0" cy="0"/>
+        </a:xfrm>
+      </p:grpSpPr>
+      <p:sp>
+        <p:nvSpPr>
+          <p:cNvPr id="2" name="Text 0"/>
+          <p:cNvSpPr/>
+          <p:nvPr/>
+        </p:nvSpPr>
+        <p:spPr>
+          <a:xfrm>
+            <a:off x="457200" y="256032"/>
+            <a:ext cx="8229600" cy="274320"/>
+          </a:xfrm>
+          <a:prstGeom prst="rect">
+            <a:avLst/>
+          </a:prstGeom>
+          <a:noFill/>
+          <a:ln/>
+        </p:spPr>
+        <p:txBody>
+          <a:bodyPr wrap="square" lIns="0" tIns="0" rIns="0" bIns="0" rtlCol="0" anchor="ctr"/>
+          <a:lstStyle/>
+          <a:p>
+            <a:pPr algn="l" indent="0" marL="0">
+              <a:buNone/>
+            </a:pPr>
+            <a:r>
+              <a:rPr lang="en-US" sz="1200" b="1" spc="100" kern="0" dirty="0">
+                <a:solidFill>
+                  <a:srgbClr val="9A5B28"/>
+                </a:solidFill>
+                <a:latin typeface="Noto Sans KR" pitchFamily="34" charset="0"/>
+                <a:ea typeface="Noto Sans KR" pitchFamily="34" charset="-122"/>
+                <a:cs typeface="Noto Sans KR" pitchFamily="34" charset="-120"/>
+              </a:rPr>
               <a:t>4주차 · 다음 단계</a:t>
             </a:r>
             <a:endParaRPr lang="en-US" sz="1200" dirty="0"/>
